--- a/test-corpus/word-verification/minimal.pptx
+++ b/test-corpus/word-verification/minimal.pptx
@@ -144,8 +144,8 @@
         </p:nvSpPr>
         <p:spPr>
           <a:xfrm>
-            <a:off x="1690688" y="3268266"/>
-            <a:ext cx="1666875" cy="1785938"/>
+            <a:off x="457200" y="3358258"/>
+            <a:ext cx="1330905" cy="1425970"/>
           </a:xfrm>
           <a:prstGeom prst="rect">
             <a:avLst/>
@@ -153,7 +153,7 @@
           <a:solidFill>
             <a:srgbClr val="D9E2F3"/>
           </a:solidFill>
-          <a:ln w="31750" cap="flat" cmpd="sng" algn="ctr">
+          <a:ln w="25351" cap="flat" cmpd="sng" algn="ctr">
             <a:solidFill>
               <a:srgbClr val="2F5496"/>
             </a:solidFill>
@@ -177,7 +177,7 @@
           </a:fontRef>
         </p:style>
         <p:txBody>
-          <a:bodyPr rot="0" spcFirstLastPara="0" vertOverflow="overflow" horzOverflow="overflow" vert="horz" wrap="square" lIns="228600" tIns="114300" rIns="228600" bIns="114300" numCol="1" spcCol="0" rtlCol="0" fromWordArt="0" anchor="ctr" anchorCtr="0" forceAA="0" compatLnSpc="1">
+          <a:bodyPr rot="0" spcFirstLastPara="0" vertOverflow="overflow" horzOverflow="overflow" vert="horz" wrap="square" lIns="182524" tIns="91262" rIns="182524" bIns="91262" numCol="1" spcCol="0" rtlCol="0" fromWordArt="0" anchor="ctr" anchorCtr="0" forceAA="0" compatLnSpc="1">
             <a:prstTxWarp prst="textNoShape">
               <a:avLst/>
             </a:prstTxWarp>
@@ -194,7 +194,7 @@
               </a:spcAft>
             </a:pPr>
             <a:r>
-              <a:rPr lang="en-US" sz="3000" dirty="0">
+              <a:rPr lang="en-US" sz="2395" dirty="0">
                 <a:solidFill>
                   <a:srgbClr val="000000"/>
                 </a:solidFill>
@@ -212,8 +212,8 @@
         </p:nvSpPr>
         <p:spPr>
           <a:xfrm>
-            <a:off x="5262563" y="2345531"/>
-            <a:ext cx="1666875" cy="1785938"/>
+            <a:off x="3309139" y="2621507"/>
+            <a:ext cx="1330905" cy="1425970"/>
           </a:xfrm>
           <a:prstGeom prst="rect">
             <a:avLst/>
@@ -221,7 +221,7 @@
           <a:solidFill>
             <a:srgbClr val="D9E2F3"/>
           </a:solidFill>
-          <a:ln w="31750" cap="flat" cmpd="sng" algn="ctr">
+          <a:ln w="25351" cap="flat" cmpd="sng" algn="ctr">
             <a:solidFill>
               <a:srgbClr val="2F5496"/>
             </a:solidFill>
@@ -245,7 +245,7 @@
           </a:fontRef>
         </p:style>
         <p:txBody>
-          <a:bodyPr rot="0" spcFirstLastPara="0" vertOverflow="overflow" horzOverflow="overflow" vert="horz" wrap="square" lIns="228600" tIns="114300" rIns="228600" bIns="114300" numCol="1" spcCol="0" rtlCol="0" fromWordArt="0" anchor="ctr" anchorCtr="0" forceAA="0" compatLnSpc="1">
+          <a:bodyPr rot="0" spcFirstLastPara="0" vertOverflow="overflow" horzOverflow="overflow" vert="horz" wrap="square" lIns="182524" tIns="91262" rIns="182524" bIns="91262" numCol="1" spcCol="0" rtlCol="0" fromWordArt="0" anchor="ctr" anchorCtr="0" forceAA="0" compatLnSpc="1">
             <a:prstTxWarp prst="textNoShape">
               <a:avLst/>
             </a:prstTxWarp>
@@ -262,7 +262,7 @@
               </a:spcAft>
             </a:pPr>
             <a:r>
-              <a:rPr lang="en-US" sz="3000" dirty="0">
+              <a:rPr lang="en-US" sz="2395" dirty="0">
                 <a:solidFill>
                   <a:srgbClr val="000000"/>
                 </a:solidFill>
@@ -280,8 +280,8 @@
         </p:nvSpPr>
         <p:spPr>
           <a:xfrm>
-            <a:off x="8834438" y="3268266"/>
-            <a:ext cx="1666875" cy="1785938"/>
+            <a:off x="6161079" y="3358258"/>
+            <a:ext cx="1330905" cy="1425970"/>
           </a:xfrm>
           <a:prstGeom prst="rect">
             <a:avLst/>
@@ -289,7 +289,7 @@
           <a:solidFill>
             <a:srgbClr val="D9E2F3"/>
           </a:solidFill>
-          <a:ln w="31750" cap="flat" cmpd="sng" algn="ctr">
+          <a:ln w="25351" cap="flat" cmpd="sng" algn="ctr">
             <a:solidFill>
               <a:srgbClr val="2F5496"/>
             </a:solidFill>
@@ -313,7 +313,7 @@
           </a:fontRef>
         </p:style>
         <p:txBody>
-          <a:bodyPr rot="0" spcFirstLastPara="0" vertOverflow="overflow" horzOverflow="overflow" vert="horz" wrap="square" lIns="228600" tIns="114300" rIns="228600" bIns="114300" numCol="1" spcCol="0" rtlCol="0" fromWordArt="0" anchor="ctr" anchorCtr="0" forceAA="0" compatLnSpc="1">
+          <a:bodyPr rot="0" spcFirstLastPara="0" vertOverflow="overflow" horzOverflow="overflow" vert="horz" wrap="square" lIns="182524" tIns="91262" rIns="182524" bIns="91262" numCol="1" spcCol="0" rtlCol="0" fromWordArt="0" anchor="ctr" anchorCtr="0" forceAA="0" compatLnSpc="1">
             <a:prstTxWarp prst="textNoShape">
               <a:avLst/>
             </a:prstTxWarp>
@@ -330,7 +330,7 @@
               </a:spcAft>
             </a:pPr>
             <a:r>
-              <a:rPr lang="en-US" sz="3000" dirty="0">
+              <a:rPr lang="en-US" sz="2395" dirty="0">
                 <a:solidFill>
                   <a:srgbClr val="000000"/>
                 </a:solidFill>
@@ -351,13 +351,13 @@
         </p:nvCxnSpPr>
         <p:spPr>
           <a:xfrm flipV="1">
-            <a:off x="3357563" y="3238501"/>
-            <a:ext cx="1905000" cy="922733"/>
+            <a:off x="1788105" y="3334492"/>
+            <a:ext cx="1521034" cy="736750"/>
           </a:xfrm>
           <a:prstGeom prst="line">
             <a:avLst/>
           </a:prstGeom>
-          <a:ln w="31750" cap="flat" cmpd="sng" algn="ctr">
+          <a:ln w="25351" cap="flat" cmpd="sng" algn="ctr">
             <a:solidFill>
               <a:srgbClr val="2F5496"/>
             </a:solidFill>
@@ -391,13 +391,13 @@
         </p:nvCxnSpPr>
         <p:spPr>
           <a:xfrm>
-            <a:off x="6929438" y="3238501"/>
-            <a:ext cx="1905000" cy="922733"/>
+            <a:off x="4640045" y="3334492"/>
+            <a:ext cx="1521034" cy="736750"/>
           </a:xfrm>
           <a:prstGeom prst="line">
             <a:avLst/>
           </a:prstGeom>
-          <a:ln w="31750" cap="flat" cmpd="sng" algn="ctr">
+          <a:ln w="25351" cap="flat" cmpd="sng" algn="ctr">
             <a:solidFill>
               <a:srgbClr val="2F5496"/>
             </a:solidFill>
@@ -431,13 +431,13 @@
         </p:nvCxnSpPr>
         <p:spPr>
           <a:xfrm flipH="1">
-            <a:off x="3357563" y="4161234"/>
-            <a:ext cx="5476875" cy="0"/>
+            <a:off x="1788105" y="4071242"/>
+            <a:ext cx="4372974" cy="0"/>
           </a:xfrm>
           <a:prstGeom prst="line">
             <a:avLst/>
           </a:prstGeom>
-          <a:ln w="31750" cap="flat" cmpd="sng" algn="ctr">
+          <a:ln w="25351" cap="flat" cmpd="sng" algn="ctr">
             <a:solidFill>
               <a:srgbClr val="2F5496"/>
             </a:solidFill>
@@ -460,6 +460,88 @@
           </a:fontRef>
         </p:style>
       </p:cxnSp>
+      <p:sp>
+        <p:nvSpPr>
+          <p:cNvPr id="4" name="Mermaid source"/>
+          <p:cNvSpPr/>
+          <p:nvPr/>
+        </p:nvSpPr>
+        <p:spPr>
+          <a:xfrm>
+            <a:off x="7674864" y="1028700"/>
+            <a:ext cx="4059936" cy="5372100"/>
+          </a:xfrm>
+          <a:prstGeom prst="rect">
+            <a:avLst/>
+          </a:prstGeom>
+          <a:solidFill>
+            <a:srgbClr val="F3F4F6"/>
+          </a:solidFill>
+          <a:ln w="9525">
+            <a:solidFill>
+              <a:srgbClr val="D1D5DB"/>
+            </a:solidFill>
+          </a:ln>
+        </p:spPr>
+        <p:txBody>
+          <a:bodyPr wrap="square" lIns="91440" tIns="45720" rIns="91440" bIns="45720" anchor="t">
+            <a:noAutofit/>
+          </a:bodyPr>
+          <a:lstStyle/>
+          <a:p>
+            <a:pPr algn="l"/>
+            <a:r>
+              <a:rPr lang="en-US" sz="1400" dirty="0">
+                <a:solidFill>
+                  <a:srgbClr val="1F2937"/>
+                </a:solidFill>
+                <a:latin typeface="Consolas"/>
+                <a:cs typeface="Consolas"/>
+              </a:rPr>
+              <a:t>graph LR</a:t>
+            </a:r>
+          </a:p>
+          <a:p>
+            <a:pPr algn="l"/>
+            <a:r>
+              <a:rPr lang="en-US" sz="1400" dirty="0">
+                <a:solidFill>
+                  <a:srgbClr val="1F2937"/>
+                </a:solidFill>
+                <a:latin typeface="Consolas"/>
+                <a:cs typeface="Consolas"/>
+              </a:rPr>
+              <a:t>    A --&gt; B</a:t>
+            </a:r>
+          </a:p>
+          <a:p>
+            <a:pPr algn="l"/>
+            <a:r>
+              <a:rPr lang="en-US" sz="1400" dirty="0">
+                <a:solidFill>
+                  <a:srgbClr val="1F2937"/>
+                </a:solidFill>
+                <a:latin typeface="Consolas"/>
+                <a:cs typeface="Consolas"/>
+              </a:rPr>
+              <a:t>    B --&gt; C</a:t>
+            </a:r>
+          </a:p>
+          <a:p>
+            <a:pPr algn="l"/>
+            <a:r>
+              <a:rPr lang="en-US" sz="1400" dirty="0">
+                <a:solidFill>
+                  <a:srgbClr val="1F2937"/>
+                </a:solidFill>
+                <a:latin typeface="Consolas"/>
+                <a:cs typeface="Consolas"/>
+              </a:rPr>
+              <a:t>    C --&gt; A</a:t>
+            </a:r>
+          </a:p>
+        </p:txBody>
+      </p:sp>
     </p:spTree>
   </p:cSld>
   <p:clrMapOvr>
